--- a/public/fun/pack/pptx/reviewpro/보장점검양식프리미엄_41_본인점검_플래티넘아이스.pptx
+++ b/public/fun/pack/pptx/reviewpro/보장점검양식프리미엄_41_본인점검_플래티넘아이스.pptx
@@ -112,12 +112,12 @@
   <p:extLst>
     <p:ext uri="{521415D9-36F7-43E2-AB2F-B90AF26B5E84}">
       <p14:sectionLst xmlns:p14="http://schemas.microsoft.com/office/powerpoint/2010/main">
-        <p14:section name="시작" id="{C6F13589-4CB7-41EE-948C-6D1456FE4262}">
+        <p14:section name="시작" id="{0FE8D81C-397D-40EC-B90F-BF83FDE6313E}">
           <p14:sldIdLst>
             <p14:sldId id="256"/>
           </p14:sldIdLst>
         </p14:section>
-        <p14:section name="본문" id="{8239283B-C6F2-4CC0-88B1-0A7C1C59B393}">
+        <p14:section name="본문" id="{1927A0D1-C6F2-4584-8D87-70C9F94E06E6}">
           <p14:sldIdLst>
             <p14:sldId id="257"/>
             <p14:sldId id="258"/>
@@ -1521,7 +1521,7 @@
             </a:lvl1pPr>
           </a:lstStyle>
           <a:p>
-            <a:fld id="{3FA17FBB-2845-4E3C-9346-E317646A6A71}" type="slidenum">
+            <a:fld id="{57341F83-4472-4458-90C3-59D256072322}" type="slidenum">
               <a:rPr lang="en-US"/>
               <a:t>‹#›</a:t>
             </a:fld>
@@ -2217,7 +2217,7 @@
             </a:lvl1pPr>
           </a:lstStyle>
           <a:p>
-            <a:fld id="{7014BE5A-461D-411C-A1E3-A0FB403CEA2F}" type="slidenum">
+            <a:fld id="{2D86308B-7145-4EF3-AD29-DCC69F8DA69A}" type="slidenum">
               <a:rPr lang="en-US"/>
               <a:t>‹#›</a:t>
             </a:fld>
@@ -2966,7 +2966,7 @@
             </a:lvl1pPr>
           </a:lstStyle>
           <a:p>
-            <a:fld id="{7A84AE8D-B7C2-4331-ADCF-2A6CBFD96F13}" type="slidenum">
+            <a:fld id="{5FA06C8A-B473-4271-88B4-EF5F05E17C5E}" type="slidenum">
               <a:rPr lang="en-US"/>
               <a:t>‹#›</a:t>
             </a:fld>
@@ -3829,7 +3829,7 @@
           <a:p>
             <a:r>
               <a:rPr lang="ko-KR"/>
-              <a:t>새해에는 한 번 정리하고 시작합니다</a:t>
+              <a:t>한 번 정리하고 시작합니다</a:t>
             </a:r>
           </a:p>
         </p:txBody>
@@ -3851,7 +3851,7 @@
           <a:p>
             <a:r>
               <a:rPr lang="ko-KR"/>
-              <a:t>본인 점검 · 0000. 00. 00</a:t>
+              <a:t>본인 점검 · 날짜 입력</a:t>
             </a:r>
           </a:p>
           <a:p>
@@ -3964,7 +3964,7 @@
           <a:bodyPr/>
           <a:lstStyle/>
           <a:p>
-            <a:fld id="{6A45D54A-0966-4918-970A-EB7F39C2C00D}" type="slidenum">
+            <a:fld id="{E9B6A5B7-4A63-48BC-995B-9AD786811AD9}" type="slidenum">
               <a:rPr lang="en-US"/>
               <a:t>‹#›</a:t>
             </a:fld>
@@ -4502,7 +4502,7 @@
           <a:bodyPr/>
           <a:lstStyle/>
           <a:p>
-            <a:fld id="{1E603F46-DDDF-4296-9E4F-34E158F77CF2}" type="slidenum">
+            <a:fld id="{D19E78EF-F3CA-4CC1-BD53-964986976467}" type="slidenum">
               <a:rPr lang="en-US"/>
               <a:t>‹#›</a:t>
             </a:fld>
@@ -6030,7 +6030,7 @@
           <a:bodyPr/>
           <a:lstStyle/>
           <a:p>
-            <a:fld id="{759FC6CB-558B-4452-A2D2-EB49FFDEFCF4}" type="slidenum">
+            <a:fld id="{ABC4DE1B-FA8B-47FC-9561-9B9FE4E8A83B}" type="slidenum">
               <a:rPr lang="en-US"/>
               <a:t>‹#›</a:t>
             </a:fld>
@@ -7602,7 +7602,7 @@
           <a:bodyPr/>
           <a:lstStyle/>
           <a:p>
-            <a:fld id="{AFA1E200-CEF2-4FBD-BCEF-17AE6D6AD3FE}" type="slidenum">
+            <a:fld id="{F986E0CD-7433-4436-A350-20E7F4810DF3}" type="slidenum">
               <a:rPr lang="en-US"/>
               <a:t>‹#›</a:t>
             </a:fld>
@@ -8504,7 +8504,7 @@
           <a:bodyPr/>
           <a:lstStyle/>
           <a:p>
-            <a:fld id="{A77F19C7-BBF4-4E7E-BA87-4724027D9EC3}" type="slidenum">
+            <a:fld id="{56F77EC2-9965-4920-BD53-ECE3EABFA79E}" type="slidenum">
               <a:rPr lang="en-US"/>
               <a:t>‹#›</a:t>
             </a:fld>
